--- a/assets/libreoffice_impr_njc/209c3917-259e-4329-9f94-bb7a849e679c/The Golden Age of Arcade Games.pptx
+++ b/assets/libreoffice_impr_njc/209c3917-259e-4329-9f94-bb7a849e679c/The Golden Age of Arcade Games.pptx
@@ -2489,8 +2489,9 @@
     <p:bg>
       <p:bgPr>
         <a:solidFill>
-          <a:srgbClr val="1A1C2C"/>
+          <a:srgbClr val="000000"/>
         </a:solidFill>
+        <a:effectLst/>
       </p:bgPr>
     </p:bg>
     <p:spTree>
@@ -2599,6 +2600,10 @@
           </a:gradFill>
           <a:ln/>
         </p:spPr>
+        <p:txBody>
+          <a:bodyPr/>
+          <a:p/>
+        </p:txBody>
       </p:sp>
       <p:sp>
         <p:nvSpPr>
@@ -2627,9 +2632,9 @@
               </a:lnSpc>
             </a:pPr>
             <a:r>
-              <a:rPr lang="en-US" sz="4500" dirty="0">
-                <a:solidFill>
-                  <a:srgbClr val="F4F4F4"/>
+              <a:rPr lang="en-US" sz="4500" dirty="0" b="1" u="sng">
+                <a:solidFill>
+                  <a:srgbClr val="FFFF00"/>
                 </a:solidFill>
                 <a:latin typeface="Jersey 15" pitchFamily="34" charset="0"/>
                 <a:ea typeface="Jersey 15" pitchFamily="34" charset="-122"/>
@@ -2668,9 +2673,9 @@
               </a:lnSpc>
             </a:pPr>
             <a:r>
-              <a:rPr lang="en-US" sz="7200" b="1" dirty="0">
-                <a:solidFill>
-                  <a:srgbClr val="FFCD75"/>
+              <a:rPr lang="en-US" sz="7200" b="1" dirty="0" u="sng">
+                <a:solidFill>
+                  <a:srgbClr val="FFFF00"/>
                 </a:solidFill>
                 <a:latin typeface="Jersey 20 Charted" pitchFamily="34" charset="0"/>
                 <a:ea typeface="Jersey 20 Charted" pitchFamily="34" charset="-122"/>
@@ -2684,9 +2689,9 @@
               </a:lnSpc>
             </a:pPr>
             <a:r>
-              <a:rPr lang="en-US" sz="7200" b="1" dirty="0">
-                <a:solidFill>
-                  <a:srgbClr val="000000"/>
+              <a:rPr lang="en-US" sz="7200" b="1" dirty="0" u="sng">
+                <a:solidFill>
+                  <a:srgbClr val="FFFF00"/>
                 </a:solidFill>
                 <a:latin typeface="Jersey 20 Charted" pitchFamily="34" charset="0"/>
                 <a:ea typeface="Jersey 20 Charted" pitchFamily="34" charset="-122"/>
@@ -2700,9 +2705,9 @@
               </a:lnSpc>
             </a:pPr>
             <a:r>
-              <a:rPr lang="en-US" sz="7200" b="1" dirty="0">
-                <a:solidFill>
-                  <a:srgbClr val="FFCD75"/>
+              <a:rPr lang="en-US" sz="7200" b="1" dirty="0" u="sng">
+                <a:solidFill>
+                  <a:srgbClr val="FFFF00"/>
                 </a:solidFill>
                 <a:latin typeface="Jersey 20 Charted" pitchFamily="34" charset="0"/>
                 <a:ea typeface="Jersey 20 Charted" pitchFamily="34" charset="-122"/>
@@ -2741,9 +2746,9 @@
               </a:lnSpc>
             </a:pPr>
             <a:r>
-              <a:rPr lang="en-US" sz="4500" b="1" dirty="0">
-                <a:solidFill>
-                  <a:srgbClr val="F4F4F4"/>
+              <a:rPr lang="en-US" sz="4500" b="1" dirty="0" u="sng">
+                <a:solidFill>
+                  <a:srgbClr val="FFFF00"/>
                 </a:solidFill>
                 <a:latin typeface="Jersey 15" pitchFamily="34" charset="0"/>
                 <a:ea typeface="Jersey 15" pitchFamily="34" charset="-122"/>
@@ -2798,6 +2803,10 @@
           </a:solidFill>
           <a:ln/>
         </p:spPr>
+        <p:txBody>
+          <a:bodyPr/>
+          <a:p/>
+        </p:txBody>
       </p:sp>
       <p:sp>
         <p:nvSpPr>
@@ -2826,9 +2835,9 @@
               </a:lnSpc>
             </a:pPr>
             <a:r>
-              <a:rPr lang="en-US" sz="2700" dirty="0">
-                <a:solidFill>
-                  <a:srgbClr val="29ADFF"/>
+              <a:rPr lang="en-US" sz="2700" dirty="0" b="1" u="sng">
+                <a:solidFill>
+                  <a:srgbClr val="FFFF00"/>
                 </a:solidFill>
                 <a:latin typeface="Jersey 15" pitchFamily="34" charset="0"/>
                 <a:ea typeface="Jersey 15" pitchFamily="34" charset="-122"/>
@@ -2867,9 +2876,9 @@
               </a:lnSpc>
             </a:pPr>
             <a:r>
-              <a:rPr lang="en-US" sz="2250" dirty="0">
-                <a:solidFill>
-                  <a:srgbClr val="F4F4F4"/>
+              <a:rPr lang="en-US" sz="2250" dirty="0" b="1" u="sng">
+                <a:solidFill>
+                  <a:srgbClr val="FFFF00"/>
                 </a:solidFill>
                 <a:latin typeface="Jersey 15" pitchFamily="34" charset="0"/>
                 <a:ea typeface="Jersey 15" pitchFamily="34" charset="-122"/>
@@ -2924,6 +2933,10 @@
           </a:solidFill>
           <a:ln/>
         </p:spPr>
+        <p:txBody>
+          <a:bodyPr/>
+          <a:p/>
+        </p:txBody>
       </p:sp>
       <p:sp>
         <p:nvSpPr>
@@ -2968,6 +2981,10 @@
           </a:solidFill>
           <a:ln/>
         </p:spPr>
+        <p:txBody>
+          <a:bodyPr/>
+          <a:p/>
+        </p:txBody>
       </p:sp>
       <p:sp>
         <p:nvSpPr>
@@ -3012,6 +3029,10 @@
           </a:solidFill>
           <a:ln/>
         </p:spPr>
+        <p:txBody>
+          <a:bodyPr/>
+          <a:p/>
+        </p:txBody>
       </p:sp>
     </p:spTree>
   </p:cSld>
@@ -3031,8 +3052,9 @@
     <p:bg>
       <p:bgPr>
         <a:solidFill>
-          <a:srgbClr val="1A1C2C"/>
+          <a:srgbClr val="000000"/>
         </a:solidFill>
+        <a:effectLst/>
       </p:bgPr>
     </p:bg>
     <p:spTree>
@@ -5143,8 +5165,9 @@
     <p:bg>
       <p:bgPr>
         <a:solidFill>
-          <a:srgbClr val="1A1C2C"/>
+          <a:srgbClr val="000000"/>
         </a:solidFill>
+        <a:effectLst/>
       </p:bgPr>
     </p:bg>
     <p:spTree>
@@ -5653,8 +5676,9 @@
     <p:bg>
       <p:bgPr>
         <a:solidFill>
-          <a:srgbClr val="1A1C2C"/>
+          <a:srgbClr val="000000"/>
         </a:solidFill>
+        <a:effectLst/>
       </p:bgPr>
     </p:bg>
     <p:spTree>
@@ -7080,8 +7104,9 @@
     <p:bg>
       <p:bgPr>
         <a:solidFill>
-          <a:srgbClr val="1A1C2C"/>
+          <a:srgbClr val="000000"/>
         </a:solidFill>
+        <a:effectLst/>
       </p:bgPr>
     </p:bg>
     <p:spTree>
@@ -10213,8 +10238,9 @@
     <p:bg>
       <p:bgPr>
         <a:solidFill>
-          <a:srgbClr val="1A1C2C"/>
+          <a:srgbClr val="000000"/>
         </a:solidFill>
+        <a:effectLst/>
       </p:bgPr>
     </p:bg>
     <p:spTree>
@@ -10723,8 +10749,9 @@
     <p:bg>
       <p:bgPr>
         <a:solidFill>
-          <a:srgbClr val="1A1C2C"/>
+          <a:srgbClr val="000000"/>
         </a:solidFill>
+        <a:effectLst/>
       </p:bgPr>
     </p:bg>
     <p:spTree>
@@ -13621,8 +13648,9 @@
     <p:bg>
       <p:bgPr>
         <a:solidFill>
-          <a:srgbClr val="1A1C2C"/>
+          <a:srgbClr val="000000"/>
         </a:solidFill>
+        <a:effectLst/>
       </p:bgPr>
     </p:bg>
     <p:spTree>
@@ -16677,8 +16705,9 @@
     <p:bg>
       <p:bgPr>
         <a:solidFill>
-          <a:srgbClr val="1A1C2C"/>
+          <a:srgbClr val="000000"/>
         </a:solidFill>
+        <a:effectLst/>
       </p:bgPr>
     </p:bg>
     <p:spTree>
@@ -17168,8 +17197,9 @@
     <p:bg>
       <p:bgPr>
         <a:solidFill>
-          <a:srgbClr val="1A1C2C"/>
+          <a:srgbClr val="000000"/>
         </a:solidFill>
+        <a:effectLst/>
       </p:bgPr>
     </p:bg>
     <p:spTree>
@@ -19866,8 +19896,9 @@
     <p:bg>
       <p:bgPr>
         <a:solidFill>
-          <a:srgbClr val="1A1C2C"/>
+          <a:srgbClr val="000000"/>
         </a:solidFill>
+        <a:effectLst/>
       </p:bgPr>
     </p:bg>
     <p:spTree>
@@ -21753,8 +21784,9 @@
     <p:bg>
       <p:bgPr>
         <a:solidFill>
-          <a:srgbClr val="1A1C2C"/>
+          <a:srgbClr val="000000"/>
         </a:solidFill>
+        <a:effectLst/>
       </p:bgPr>
     </p:bg>
     <p:spTree>
@@ -22952,8 +22984,9 @@
     <p:bg>
       <p:bgPr>
         <a:solidFill>
-          <a:srgbClr val="1A1C2C"/>
+          <a:srgbClr val="000000"/>
         </a:solidFill>
+        <a:effectLst/>
       </p:bgPr>
     </p:bg>
     <p:spTree>
@@ -24554,8 +24587,9 @@
     <p:bg>
       <p:bgPr>
         <a:solidFill>
-          <a:srgbClr val="1A1C2C"/>
+          <a:srgbClr val="000000"/>
         </a:solidFill>
+        <a:effectLst/>
       </p:bgPr>
     </p:bg>
     <p:spTree>
@@ -25064,8 +25098,9 @@
     <p:bg>
       <p:bgPr>
         <a:solidFill>
-          <a:srgbClr val="1A1C2C"/>
+          <a:srgbClr val="000000"/>
         </a:solidFill>
+        <a:effectLst/>
       </p:bgPr>
     </p:bg>
     <p:spTree>
@@ -25723,8 +25758,9 @@
     <p:bg>
       <p:bgPr>
         <a:solidFill>
-          <a:srgbClr val="1A1C2C"/>
+          <a:srgbClr val="000000"/>
         </a:solidFill>
+        <a:effectLst/>
       </p:bgPr>
     </p:bg>
     <p:spTree>
@@ -27447,8 +27483,9 @@
     <p:bg>
       <p:bgPr>
         <a:solidFill>
-          <a:srgbClr val="1A1C2C"/>
+          <a:srgbClr val="000000"/>
         </a:solidFill>
+        <a:effectLst/>
       </p:bgPr>
     </p:bg>
     <p:spTree>
@@ -29942,8 +29979,9 @@
     <p:bg>
       <p:bgPr>
         <a:solidFill>
-          <a:srgbClr val="1A1C2C"/>
+          <a:srgbClr val="000000"/>
         </a:solidFill>
+        <a:effectLst/>
       </p:bgPr>
     </p:bg>
     <p:spTree>
@@ -30471,8 +30509,9 @@
     <p:bg>
       <p:bgPr>
         <a:solidFill>
-          <a:srgbClr val="1A1C2C"/>
+          <a:srgbClr val="000000"/>
         </a:solidFill>
+        <a:effectLst/>
       </p:bgPr>
     </p:bg>
     <p:spTree>
@@ -32368,8 +32407,9 @@
     <p:bg>
       <p:bgPr>
         <a:solidFill>
-          <a:srgbClr val="1A1C2C"/>
+          <a:srgbClr val="000000"/>
         </a:solidFill>
+        <a:effectLst/>
       </p:bgPr>
     </p:bg>
     <p:spTree>
